--- a/Decision Tree.pptx
+++ b/Decision Tree.pptx
@@ -121,6 +121,11 @@
       </a:defRPr>
     </a:lvl9pPr>
   </p:defaultTextStyle>
+  <p:extLst>
+    <p:ext uri="{EFAFB233-063F-42B5-8137-9DF3F51BA10A}">
+      <p15:sldGuideLst xmlns:p15="http://schemas.microsoft.com/office/powerpoint/2012/main"/>
+    </p:ext>
+  </p:extLst>
 </p:presentation>
 </file>
 
@@ -255,7 +260,7 @@
           <a:p>
             <a:fld id="{2F176D4A-F7E3-4628-907D-FD03A6819248}" type="datetimeFigureOut">
               <a:rPr lang="en-US" smtClean="0"/>
-              <a:t>11/1/2025</a:t>
+              <a:t>11/5/2025</a:t>
             </a:fld>
             <a:endParaRPr lang="en-US"/>
           </a:p>
@@ -425,7 +430,7 @@
           <a:p>
             <a:fld id="{2F176D4A-F7E3-4628-907D-FD03A6819248}" type="datetimeFigureOut">
               <a:rPr lang="en-US" smtClean="0"/>
-              <a:t>11/1/2025</a:t>
+              <a:t>11/5/2025</a:t>
             </a:fld>
             <a:endParaRPr lang="en-US"/>
           </a:p>
@@ -605,7 +610,7 @@
           <a:p>
             <a:fld id="{2F176D4A-F7E3-4628-907D-FD03A6819248}" type="datetimeFigureOut">
               <a:rPr lang="en-US" smtClean="0"/>
-              <a:t>11/1/2025</a:t>
+              <a:t>11/5/2025</a:t>
             </a:fld>
             <a:endParaRPr lang="en-US"/>
           </a:p>
@@ -775,7 +780,7 @@
           <a:p>
             <a:fld id="{2F176D4A-F7E3-4628-907D-FD03A6819248}" type="datetimeFigureOut">
               <a:rPr lang="en-US" smtClean="0"/>
-              <a:t>11/1/2025</a:t>
+              <a:t>11/5/2025</a:t>
             </a:fld>
             <a:endParaRPr lang="en-US"/>
           </a:p>
@@ -1021,7 +1026,7 @@
           <a:p>
             <a:fld id="{2F176D4A-F7E3-4628-907D-FD03A6819248}" type="datetimeFigureOut">
               <a:rPr lang="en-US" smtClean="0"/>
-              <a:t>11/1/2025</a:t>
+              <a:t>11/5/2025</a:t>
             </a:fld>
             <a:endParaRPr lang="en-US"/>
           </a:p>
@@ -1253,7 +1258,7 @@
           <a:p>
             <a:fld id="{2F176D4A-F7E3-4628-907D-FD03A6819248}" type="datetimeFigureOut">
               <a:rPr lang="en-US" smtClean="0"/>
-              <a:t>11/1/2025</a:t>
+              <a:t>11/5/2025</a:t>
             </a:fld>
             <a:endParaRPr lang="en-US"/>
           </a:p>
@@ -1620,7 +1625,7 @@
           <a:p>
             <a:fld id="{2F176D4A-F7E3-4628-907D-FD03A6819248}" type="datetimeFigureOut">
               <a:rPr lang="en-US" smtClean="0"/>
-              <a:t>11/1/2025</a:t>
+              <a:t>11/5/2025</a:t>
             </a:fld>
             <a:endParaRPr lang="en-US"/>
           </a:p>
@@ -1738,7 +1743,7 @@
           <a:p>
             <a:fld id="{2F176D4A-F7E3-4628-907D-FD03A6819248}" type="datetimeFigureOut">
               <a:rPr lang="en-US" smtClean="0"/>
-              <a:t>11/1/2025</a:t>
+              <a:t>11/5/2025</a:t>
             </a:fld>
             <a:endParaRPr lang="en-US"/>
           </a:p>
@@ -1833,7 +1838,7 @@
           <a:p>
             <a:fld id="{2F176D4A-F7E3-4628-907D-FD03A6819248}" type="datetimeFigureOut">
               <a:rPr lang="en-US" smtClean="0"/>
-              <a:t>11/1/2025</a:t>
+              <a:t>11/5/2025</a:t>
             </a:fld>
             <a:endParaRPr lang="en-US"/>
           </a:p>
@@ -2110,7 +2115,7 @@
           <a:p>
             <a:fld id="{2F176D4A-F7E3-4628-907D-FD03A6819248}" type="datetimeFigureOut">
               <a:rPr lang="en-US" smtClean="0"/>
-              <a:t>11/1/2025</a:t>
+              <a:t>11/5/2025</a:t>
             </a:fld>
             <a:endParaRPr lang="en-US"/>
           </a:p>
@@ -2363,7 +2368,7 @@
           <a:p>
             <a:fld id="{2F176D4A-F7E3-4628-907D-FD03A6819248}" type="datetimeFigureOut">
               <a:rPr lang="en-US" smtClean="0"/>
-              <a:t>11/1/2025</a:t>
+              <a:t>11/5/2025</a:t>
             </a:fld>
             <a:endParaRPr lang="en-US"/>
           </a:p>
@@ -2576,7 +2581,7 @@
           <a:p>
             <a:fld id="{2F176D4A-F7E3-4628-907D-FD03A6819248}" type="datetimeFigureOut">
               <a:rPr lang="en-US" smtClean="0"/>
-              <a:t>11/1/2025</a:t>
+              <a:t>11/5/2025</a:t>
             </a:fld>
             <a:endParaRPr lang="en-US"/>
           </a:p>
@@ -3041,6 +3046,13 @@
   <p:clrMapOvr>
     <a:masterClrMapping/>
   </p:clrMapOvr>
+  <p:timing>
+    <p:tnLst>
+      <p:par>
+        <p:cTn id="1" dur="indefinite" restart="never" nodeType="tmRoot"/>
+      </p:par>
+    </p:tnLst>
+  </p:timing>
 </p:sld>
 </file>
 
@@ -3236,6 +3248,13 @@
   <p:clrMapOvr>
     <a:masterClrMapping/>
   </p:clrMapOvr>
+  <p:timing>
+    <p:tnLst>
+      <p:par>
+        <p:cTn id="1" dur="indefinite" restart="never" nodeType="tmRoot"/>
+      </p:par>
+    </p:tnLst>
+  </p:timing>
 </p:sld>
 </file>
 
@@ -3336,6 +3355,13 @@
   <p:clrMapOvr>
     <a:masterClrMapping/>
   </p:clrMapOvr>
+  <p:timing>
+    <p:tnLst>
+      <p:par>
+        <p:cTn id="1" dur="indefinite" restart="never" nodeType="tmRoot"/>
+      </p:par>
+    </p:tnLst>
+  </p:timing>
 </p:sld>
 </file>
 
@@ -3440,6 +3466,13 @@
   <p:clrMapOvr>
     <a:masterClrMapping/>
   </p:clrMapOvr>
+  <p:timing>
+    <p:tnLst>
+      <p:par>
+        <p:cTn id="1" dur="indefinite" restart="never" nodeType="tmRoot"/>
+      </p:par>
+    </p:tnLst>
+  </p:timing>
 </p:sld>
 </file>
 
@@ -3551,6 +3584,13 @@
   <p:clrMapOvr>
     <a:masterClrMapping/>
   </p:clrMapOvr>
+  <p:timing>
+    <p:tnLst>
+      <p:par>
+        <p:cTn id="1" dur="indefinite" restart="never" nodeType="tmRoot"/>
+      </p:par>
+    </p:tnLst>
+  </p:timing>
 </p:sld>
 </file>
 
@@ -3661,6 +3701,13 @@
   <p:clrMapOvr>
     <a:masterClrMapping/>
   </p:clrMapOvr>
+  <p:timing>
+    <p:tnLst>
+      <p:par>
+        <p:cTn id="1" dur="indefinite" restart="never" nodeType="tmRoot"/>
+      </p:par>
+    </p:tnLst>
+  </p:timing>
 </p:sld>
 </file>
 
@@ -3777,6 +3824,13 @@
   <p:clrMapOvr>
     <a:masterClrMapping/>
   </p:clrMapOvr>
+  <p:timing>
+    <p:tnLst>
+      <p:par>
+        <p:cTn id="1" dur="indefinite" restart="never" nodeType="tmRoot"/>
+      </p:par>
+    </p:tnLst>
+  </p:timing>
 </p:sld>
 </file>
 
@@ -3893,6 +3947,13 @@
   <p:clrMapOvr>
     <a:masterClrMapping/>
   </p:clrMapOvr>
+  <p:timing>
+    <p:tnLst>
+      <p:par>
+        <p:cTn id="1" dur="indefinite" restart="never" nodeType="tmRoot"/>
+      </p:par>
+    </p:tnLst>
+  </p:timing>
 </p:sld>
 </file>
 
@@ -3985,6 +4046,13 @@
   <p:clrMapOvr>
     <a:masterClrMapping/>
   </p:clrMapOvr>
+  <p:timing>
+    <p:tnLst>
+      <p:par>
+        <p:cTn id="1" dur="indefinite" restart="never" nodeType="tmRoot"/>
+      </p:par>
+    </p:tnLst>
+  </p:timing>
 </p:sld>
 </file>
 
@@ -4039,6 +4107,13 @@
   <p:clrMapOvr>
     <a:masterClrMapping/>
   </p:clrMapOvr>
+  <p:timing>
+    <p:tnLst>
+      <p:par>
+        <p:cTn id="1" dur="indefinite" restart="never" nodeType="tmRoot"/>
+      </p:par>
+    </p:tnLst>
+  </p:timing>
 </p:sld>
 </file>
 
@@ -6473,6 +6548,13 @@
   <p:clrMapOvr>
     <a:masterClrMapping/>
   </p:clrMapOvr>
+  <p:timing>
+    <p:tnLst>
+      <p:par>
+        <p:cTn id="1" dur="indefinite" restart="never" nodeType="tmRoot"/>
+      </p:par>
+    </p:tnLst>
+  </p:timing>
 </p:sld>
 </file>
 
@@ -6569,6 +6651,13 @@
   <p:clrMapOvr>
     <a:masterClrMapping/>
   </p:clrMapOvr>
+  <p:timing>
+    <p:tnLst>
+      <p:par>
+        <p:cTn id="1" dur="indefinite" restart="never" nodeType="tmRoot"/>
+      </p:par>
+    </p:tnLst>
+  </p:timing>
 </p:sld>
 </file>
 
@@ -6599,16 +6688,21 @@
             <p:ph type="title"/>
           </p:nvPr>
         </p:nvSpPr>
-        <p:spPr/>
+        <p:spPr>
+          <a:xfrm>
+            <a:off x="838200" y="365125"/>
+            <a:ext cx="10515600" cy="832739"/>
+          </a:xfrm>
+        </p:spPr>
         <p:txBody>
           <a:bodyPr/>
           <a:lstStyle/>
           <a:p>
             <a:r>
-              <a:rPr lang="en-US" dirty="0" smtClean="0"/>
+              <a:rPr lang="en-US" b="1" dirty="0" smtClean="0"/>
               <a:t>Step 1 — Information Gain for Each Attribute</a:t>
             </a:r>
-            <a:endParaRPr lang="en-US" dirty="0"/>
+            <a:endParaRPr lang="en-US" b="1" dirty="0"/>
           </a:p>
         </p:txBody>
       </p:sp>
@@ -6628,7 +6722,7 @@
         </p:blipFill>
         <p:spPr>
           <a:xfrm>
-            <a:off x="663842" y="1413608"/>
+            <a:off x="663842" y="1404464"/>
             <a:ext cx="6182588" cy="1324160"/>
           </a:xfrm>
           <a:prstGeom prst="rect">
@@ -6670,6 +6764,13 @@
   <p:clrMapOvr>
     <a:masterClrMapping/>
   </p:clrMapOvr>
+  <p:timing>
+    <p:tnLst>
+      <p:par>
+        <p:cTn id="1" dur="indefinite" restart="never" nodeType="tmRoot"/>
+      </p:par>
+    </p:tnLst>
+  </p:timing>
 </p:sld>
 </file>
 
@@ -6747,6 +6848,13 @@
   <p:clrMapOvr>
     <a:masterClrMapping/>
   </p:clrMapOvr>
+  <p:timing>
+    <p:tnLst>
+      <p:par>
+        <p:cTn id="1" dur="indefinite" restart="never" nodeType="tmRoot"/>
+      </p:par>
+    </p:tnLst>
+  </p:timing>
 </p:sld>
 </file>
 
@@ -6843,6 +6951,13 @@
   <p:clrMapOvr>
     <a:masterClrMapping/>
   </p:clrMapOvr>
+  <p:timing>
+    <p:tnLst>
+      <p:par>
+        <p:cTn id="1" dur="indefinite" restart="never" nodeType="tmRoot"/>
+      </p:par>
+    </p:tnLst>
+  </p:timing>
 </p:sld>
 </file>
 
@@ -6939,6 +7054,13 @@
   <p:clrMapOvr>
     <a:masterClrMapping/>
   </p:clrMapOvr>
+  <p:timing>
+    <p:tnLst>
+      <p:par>
+        <p:cTn id="1" dur="indefinite" restart="never" nodeType="tmRoot"/>
+      </p:par>
+    </p:tnLst>
+  </p:timing>
 </p:sld>
 </file>
 
@@ -7018,6 +7140,13 @@
   <p:clrMapOvr>
     <a:masterClrMapping/>
   </p:clrMapOvr>
+  <p:timing>
+    <p:tnLst>
+      <p:par>
+        <p:cTn id="1" dur="indefinite" restart="never" nodeType="tmRoot"/>
+      </p:par>
+    </p:tnLst>
+  </p:timing>
 </p:sld>
 </file>
 
@@ -7167,6 +7296,13 @@
   <p:clrMapOvr>
     <a:masterClrMapping/>
   </p:clrMapOvr>
+  <p:timing>
+    <p:tnLst>
+      <p:par>
+        <p:cTn id="1" dur="indefinite" restart="never" nodeType="tmRoot"/>
+      </p:par>
+    </p:tnLst>
+  </p:timing>
 </p:sld>
 </file>
 

--- a/Decision Tree.pptx
+++ b/Decision Tree.pptx
@@ -14,15 +14,14 @@
     <p:sldId id="262" r:id="rId8"/>
     <p:sldId id="263" r:id="rId9"/>
     <p:sldId id="264" r:id="rId10"/>
-    <p:sldId id="265" r:id="rId11"/>
-    <p:sldId id="269" r:id="rId12"/>
-    <p:sldId id="270" r:id="rId13"/>
-    <p:sldId id="271" r:id="rId14"/>
-    <p:sldId id="272" r:id="rId15"/>
-    <p:sldId id="273" r:id="rId16"/>
-    <p:sldId id="266" r:id="rId17"/>
-    <p:sldId id="274" r:id="rId18"/>
-    <p:sldId id="267" r:id="rId19"/>
+    <p:sldId id="269" r:id="rId11"/>
+    <p:sldId id="270" r:id="rId12"/>
+    <p:sldId id="271" r:id="rId13"/>
+    <p:sldId id="272" r:id="rId14"/>
+    <p:sldId id="273" r:id="rId15"/>
+    <p:sldId id="266" r:id="rId16"/>
+    <p:sldId id="274" r:id="rId17"/>
+    <p:sldId id="267" r:id="rId18"/>
   </p:sldIdLst>
   <p:sldSz cx="12192000" cy="6858000"/>
   <p:notesSz cx="6858000" cy="9144000"/>
@@ -260,7 +259,7 @@
           <a:p>
             <a:fld id="{2F176D4A-F7E3-4628-907D-FD03A6819248}" type="datetimeFigureOut">
               <a:rPr lang="en-US" smtClean="0"/>
-              <a:t>11/5/2025</a:t>
+              <a:t>11/13/2025</a:t>
             </a:fld>
             <a:endParaRPr lang="en-US"/>
           </a:p>
@@ -430,7 +429,7 @@
           <a:p>
             <a:fld id="{2F176D4A-F7E3-4628-907D-FD03A6819248}" type="datetimeFigureOut">
               <a:rPr lang="en-US" smtClean="0"/>
-              <a:t>11/5/2025</a:t>
+              <a:t>11/13/2025</a:t>
             </a:fld>
             <a:endParaRPr lang="en-US"/>
           </a:p>
@@ -610,7 +609,7 @@
           <a:p>
             <a:fld id="{2F176D4A-F7E3-4628-907D-FD03A6819248}" type="datetimeFigureOut">
               <a:rPr lang="en-US" smtClean="0"/>
-              <a:t>11/5/2025</a:t>
+              <a:t>11/13/2025</a:t>
             </a:fld>
             <a:endParaRPr lang="en-US"/>
           </a:p>
@@ -780,7 +779,7 @@
           <a:p>
             <a:fld id="{2F176D4A-F7E3-4628-907D-FD03A6819248}" type="datetimeFigureOut">
               <a:rPr lang="en-US" smtClean="0"/>
-              <a:t>11/5/2025</a:t>
+              <a:t>11/13/2025</a:t>
             </a:fld>
             <a:endParaRPr lang="en-US"/>
           </a:p>
@@ -1026,7 +1025,7 @@
           <a:p>
             <a:fld id="{2F176D4A-F7E3-4628-907D-FD03A6819248}" type="datetimeFigureOut">
               <a:rPr lang="en-US" smtClean="0"/>
-              <a:t>11/5/2025</a:t>
+              <a:t>11/13/2025</a:t>
             </a:fld>
             <a:endParaRPr lang="en-US"/>
           </a:p>
@@ -1258,7 +1257,7 @@
           <a:p>
             <a:fld id="{2F176D4A-F7E3-4628-907D-FD03A6819248}" type="datetimeFigureOut">
               <a:rPr lang="en-US" smtClean="0"/>
-              <a:t>11/5/2025</a:t>
+              <a:t>11/13/2025</a:t>
             </a:fld>
             <a:endParaRPr lang="en-US"/>
           </a:p>
@@ -1625,7 +1624,7 @@
           <a:p>
             <a:fld id="{2F176D4A-F7E3-4628-907D-FD03A6819248}" type="datetimeFigureOut">
               <a:rPr lang="en-US" smtClean="0"/>
-              <a:t>11/5/2025</a:t>
+              <a:t>11/13/2025</a:t>
             </a:fld>
             <a:endParaRPr lang="en-US"/>
           </a:p>
@@ -1743,7 +1742,7 @@
           <a:p>
             <a:fld id="{2F176D4A-F7E3-4628-907D-FD03A6819248}" type="datetimeFigureOut">
               <a:rPr lang="en-US" smtClean="0"/>
-              <a:t>11/5/2025</a:t>
+              <a:t>11/13/2025</a:t>
             </a:fld>
             <a:endParaRPr lang="en-US"/>
           </a:p>
@@ -1838,7 +1837,7 @@
           <a:p>
             <a:fld id="{2F176D4A-F7E3-4628-907D-FD03A6819248}" type="datetimeFigureOut">
               <a:rPr lang="en-US" smtClean="0"/>
-              <a:t>11/5/2025</a:t>
+              <a:t>11/13/2025</a:t>
             </a:fld>
             <a:endParaRPr lang="en-US"/>
           </a:p>
@@ -2115,7 +2114,7 @@
           <a:p>
             <a:fld id="{2F176D4A-F7E3-4628-907D-FD03A6819248}" type="datetimeFigureOut">
               <a:rPr lang="en-US" smtClean="0"/>
-              <a:t>11/5/2025</a:t>
+              <a:t>11/13/2025</a:t>
             </a:fld>
             <a:endParaRPr lang="en-US"/>
           </a:p>
@@ -2368,7 +2367,7 @@
           <a:p>
             <a:fld id="{2F176D4A-F7E3-4628-907D-FD03A6819248}" type="datetimeFigureOut">
               <a:rPr lang="en-US" smtClean="0"/>
-              <a:t>11/5/2025</a:t>
+              <a:t>11/13/2025</a:t>
             </a:fld>
             <a:endParaRPr lang="en-US"/>
           </a:p>
@@ -2581,7 +2580,7 @@
           <a:p>
             <a:fld id="{2F176D4A-F7E3-4628-907D-FD03A6819248}" type="datetimeFigureOut">
               <a:rPr lang="en-US" smtClean="0"/>
-              <a:t>11/5/2025</a:t>
+              <a:t>11/13/2025</a:t>
             </a:fld>
             <a:endParaRPr lang="en-US"/>
           </a:p>
@@ -3089,208 +3088,6 @@
           <a:lstStyle/>
           <a:p>
             <a:r>
-              <a:rPr lang="en-US" dirty="0" smtClean="0"/>
-              <a:t>Entropy of sunny</a:t>
-            </a:r>
-            <a:endParaRPr lang="en-US" b="1" dirty="0"/>
-          </a:p>
-        </p:txBody>
-      </p:sp>
-      <p:pic>
-        <p:nvPicPr>
-          <p:cNvPr id="4" name="Picture 3"/>
-          <p:cNvPicPr>
-            <a:picLocks noChangeAspect="1"/>
-          </p:cNvPicPr>
-          <p:nvPr/>
-        </p:nvPicPr>
-        <p:blipFill rotWithShape="1">
-          <a:blip r:embed="rId2"/>
-          <a:srcRect b="46454"/>
-          <a:stretch/>
-        </p:blipFill>
-        <p:spPr>
-          <a:xfrm>
-            <a:off x="686033" y="1414145"/>
-            <a:ext cx="7582958" cy="1265047"/>
-          </a:xfrm>
-          <a:prstGeom prst="rect">
-            <a:avLst/>
-          </a:prstGeom>
-        </p:spPr>
-      </p:pic>
-      <p:pic>
-        <p:nvPicPr>
-          <p:cNvPr id="5" name="Picture 4"/>
-          <p:cNvPicPr>
-            <a:picLocks noChangeAspect="1"/>
-          </p:cNvPicPr>
-          <p:nvPr/>
-        </p:nvPicPr>
-        <p:blipFill rotWithShape="1">
-          <a:blip r:embed="rId3"/>
-          <a:srcRect r="58563" b="11307"/>
-          <a:stretch/>
-        </p:blipFill>
-        <p:spPr>
-          <a:xfrm>
-            <a:off x="8112020" y="3599716"/>
-            <a:ext cx="3395473" cy="2475604"/>
-          </a:xfrm>
-          <a:prstGeom prst="rect">
-            <a:avLst/>
-          </a:prstGeom>
-        </p:spPr>
-      </p:pic>
-      <p:pic>
-        <p:nvPicPr>
-          <p:cNvPr id="6" name="Picture 5"/>
-          <p:cNvPicPr>
-            <a:picLocks noChangeAspect="1"/>
-          </p:cNvPicPr>
-          <p:nvPr/>
-        </p:nvPicPr>
-        <p:blipFill>
-          <a:blip r:embed="rId4"/>
-          <a:stretch>
-            <a:fillRect/>
-          </a:stretch>
-        </p:blipFill>
-        <p:spPr>
-          <a:xfrm>
-            <a:off x="8907748" y="0"/>
-            <a:ext cx="3191320" cy="2286319"/>
-          </a:xfrm>
-          <a:prstGeom prst="rect">
-            <a:avLst/>
-          </a:prstGeom>
-        </p:spPr>
-      </p:pic>
-      <p:pic>
-        <p:nvPicPr>
-          <p:cNvPr id="7" name="Picture 6"/>
-          <p:cNvPicPr>
-            <a:picLocks noChangeAspect="1"/>
-          </p:cNvPicPr>
-          <p:nvPr/>
-        </p:nvPicPr>
-        <p:blipFill>
-          <a:blip r:embed="rId5"/>
-          <a:stretch>
-            <a:fillRect/>
-          </a:stretch>
-        </p:blipFill>
-        <p:spPr>
-          <a:xfrm>
-            <a:off x="557810" y="2888500"/>
-            <a:ext cx="2353003" cy="733527"/>
-          </a:xfrm>
-          <a:prstGeom prst="rect">
-            <a:avLst/>
-          </a:prstGeom>
-        </p:spPr>
-      </p:pic>
-      <p:pic>
-        <p:nvPicPr>
-          <p:cNvPr id="8" name="Picture 7"/>
-          <p:cNvPicPr>
-            <a:picLocks noChangeAspect="1"/>
-          </p:cNvPicPr>
-          <p:nvPr/>
-        </p:nvPicPr>
-        <p:blipFill>
-          <a:blip r:embed="rId6"/>
-          <a:stretch>
-            <a:fillRect/>
-          </a:stretch>
-        </p:blipFill>
-        <p:spPr>
-          <a:xfrm>
-            <a:off x="396978" y="3729215"/>
-            <a:ext cx="3077004" cy="609685"/>
-          </a:xfrm>
-          <a:prstGeom prst="rect">
-            <a:avLst/>
-          </a:prstGeom>
-        </p:spPr>
-      </p:pic>
-      <p:pic>
-        <p:nvPicPr>
-          <p:cNvPr id="10" name="Picture 9"/>
-          <p:cNvPicPr>
-            <a:picLocks noChangeAspect="1"/>
-          </p:cNvPicPr>
-          <p:nvPr/>
-        </p:nvPicPr>
-        <p:blipFill>
-          <a:blip r:embed="rId7"/>
-          <a:stretch>
-            <a:fillRect/>
-          </a:stretch>
-        </p:blipFill>
-        <p:spPr>
-          <a:xfrm>
-            <a:off x="216869" y="4479022"/>
-            <a:ext cx="7039957" cy="1581371"/>
-          </a:xfrm>
-          <a:prstGeom prst="rect">
-            <a:avLst/>
-          </a:prstGeom>
-        </p:spPr>
-      </p:pic>
-    </p:spTree>
-    <p:extLst>
-      <p:ext uri="{BB962C8B-B14F-4D97-AF65-F5344CB8AC3E}">
-        <p14:creationId xmlns:p14="http://schemas.microsoft.com/office/powerpoint/2010/main" val="916664175"/>
-      </p:ext>
-    </p:extLst>
-  </p:cSld>
-  <p:clrMapOvr>
-    <a:masterClrMapping/>
-  </p:clrMapOvr>
-  <p:timing>
-    <p:tnLst>
-      <p:par>
-        <p:cTn id="1" dur="indefinite" restart="never" nodeType="tmRoot"/>
-      </p:par>
-    </p:tnLst>
-  </p:timing>
-</p:sld>
-</file>
-
-<file path=ppt/slides/slide11.xml><?xml version="1.0" encoding="utf-8"?>
-<p:sld xmlns:a="http://schemas.openxmlformats.org/drawingml/2006/main" xmlns:r="http://schemas.openxmlformats.org/officeDocument/2006/relationships" xmlns:p="http://schemas.openxmlformats.org/presentationml/2006/main">
-  <p:cSld>
-    <p:spTree>
-      <p:nvGrpSpPr>
-        <p:cNvPr id="1" name=""/>
-        <p:cNvGrpSpPr/>
-        <p:nvPr/>
-      </p:nvGrpSpPr>
-      <p:grpSpPr>
-        <a:xfrm>
-          <a:off x="0" y="0"/>
-          <a:ext cx="0" cy="0"/>
-          <a:chOff x="0" y="0"/>
-          <a:chExt cx="0" cy="0"/>
-        </a:xfrm>
-      </p:grpSpPr>
-      <p:sp>
-        <p:nvSpPr>
-          <p:cNvPr id="2" name="Title 1"/>
-          <p:cNvSpPr>
-            <a:spLocks noGrp="1"/>
-          </p:cNvSpPr>
-          <p:nvPr>
-            <p:ph type="title"/>
-          </p:nvPr>
-        </p:nvSpPr>
-        <p:spPr/>
-        <p:txBody>
-          <a:bodyPr/>
-          <a:lstStyle/>
-          <a:p>
-            <a:r>
               <a:rPr lang="en-US" b="1" dirty="0" smtClean="0"/>
               <a:t>Temperature</a:t>
             </a:r>
@@ -3337,7 +3134,7 @@
         </p:blipFill>
         <p:spPr>
           <a:xfrm>
-            <a:off x="608436" y="1620431"/>
+            <a:off x="608436" y="1629575"/>
             <a:ext cx="8487960" cy="4915586"/>
           </a:xfrm>
           <a:prstGeom prst="rect">
@@ -3365,7 +3162,7 @@
 </p:sld>
 </file>
 
-<file path=ppt/slides/slide12.xml><?xml version="1.0" encoding="utf-8"?>
+<file path=ppt/slides/slide11.xml><?xml version="1.0" encoding="utf-8"?>
 <p:sld xmlns:a="http://schemas.openxmlformats.org/drawingml/2006/main" xmlns:r="http://schemas.openxmlformats.org/officeDocument/2006/relationships" xmlns:p="http://schemas.openxmlformats.org/presentationml/2006/main">
   <p:cSld>
     <p:spTree>
@@ -3476,7 +3273,7 @@
 </p:sld>
 </file>
 
-<file path=ppt/slides/slide13.xml><?xml version="1.0" encoding="utf-8"?>
+<file path=ppt/slides/slide12.xml><?xml version="1.0" encoding="utf-8"?>
 <p:sld xmlns:a="http://schemas.openxmlformats.org/drawingml/2006/main" xmlns:r="http://schemas.openxmlformats.org/officeDocument/2006/relationships" xmlns:p="http://schemas.openxmlformats.org/presentationml/2006/main">
   <p:cSld>
     <p:spTree>
@@ -3566,7 +3363,7 @@
         </p:blipFill>
         <p:spPr>
           <a:xfrm>
-            <a:off x="499872" y="618254"/>
+            <a:off x="499872" y="609110"/>
             <a:ext cx="7674864" cy="6239746"/>
           </a:xfrm>
           <a:prstGeom prst="rect">
@@ -3594,7 +3391,7 @@
 </p:sld>
 </file>
 
-<file path=ppt/slides/slide14.xml><?xml version="1.0" encoding="utf-8"?>
+<file path=ppt/slides/slide13.xml><?xml version="1.0" encoding="utf-8"?>
 <p:sld xmlns:a="http://schemas.openxmlformats.org/drawingml/2006/main" xmlns:r="http://schemas.openxmlformats.org/officeDocument/2006/relationships" xmlns:p="http://schemas.openxmlformats.org/presentationml/2006/main">
   <p:cSld>
     <p:spTree>
@@ -3711,7 +3508,7 @@
 </p:sld>
 </file>
 
-<file path=ppt/slides/slide15.xml><?xml version="1.0" encoding="utf-8"?>
+<file path=ppt/slides/slide14.xml><?xml version="1.0" encoding="utf-8"?>
 <p:sld xmlns:a="http://schemas.openxmlformats.org/drawingml/2006/main" xmlns:r="http://schemas.openxmlformats.org/officeDocument/2006/relationships" xmlns:p="http://schemas.openxmlformats.org/presentationml/2006/main">
   <p:cSld>
     <p:spTree>
@@ -3834,7 +3631,7 @@
 </p:sld>
 </file>
 
-<file path=ppt/slides/slide16.xml><?xml version="1.0" encoding="utf-8"?>
+<file path=ppt/slides/slide15.xml><?xml version="1.0" encoding="utf-8"?>
 <p:sld xmlns:a="http://schemas.openxmlformats.org/drawingml/2006/main" xmlns:r="http://schemas.openxmlformats.org/officeDocument/2006/relationships" xmlns:p="http://schemas.openxmlformats.org/presentationml/2006/main">
   <p:cSld>
     <p:spTree>
@@ -3957,7 +3754,7 @@
 </p:sld>
 </file>
 
-<file path=ppt/slides/slide17.xml><?xml version="1.0" encoding="utf-8"?>
+<file path=ppt/slides/slide16.xml><?xml version="1.0" encoding="utf-8"?>
 <p:sld xmlns:a="http://schemas.openxmlformats.org/drawingml/2006/main" xmlns:r="http://schemas.openxmlformats.org/officeDocument/2006/relationships" xmlns:p="http://schemas.openxmlformats.org/presentationml/2006/main">
   <p:cSld>
     <p:spTree>
@@ -4056,7 +3853,7 @@
 </p:sld>
 </file>
 
-<file path=ppt/slides/slide18.xml><?xml version="1.0" encoding="utf-8"?>
+<file path=ppt/slides/slide17.xml><?xml version="1.0" encoding="utf-8"?>
 <p:sld xmlns:a="http://schemas.openxmlformats.org/drawingml/2006/main" xmlns:r="http://schemas.openxmlformats.org/officeDocument/2006/relationships" xmlns:p="http://schemas.openxmlformats.org/presentationml/2006/main">
   <p:cSld>
     <p:spTree>
